--- a/CY-SE-013 - Supply Chain Security/slides/Aula_01_Policy_as_Code_e_Compliance_Automatizado.pptx
+++ b/CY-SE-013 - Supply Chain Security/slides/Aula_01_Policy_as_Code_e_Compliance_Automatizado.pptx
@@ -4747,13 +4747,22 @@
           <a:p>
             <a:pPr algn="ctr"/>
             <a:r>
-              <a:rPr sz="1000" b="0" i="0">
+              <a:rPr sz="1000" b="0" i="0" dirty="0" err="1">
                 <a:solidFill>
                   <a:srgbClr val="A6F750"/>
                 </a:solidFill>
                 <a:latin typeface="Segoe UI"/>
               </a:rPr>
-              <a:t>Módulo · CY-SE-013 - Supply Chain Security</a:t>
+              <a:t>Módulo</a:t>
+            </a:r>
+            <a:r>
+              <a:rPr sz="1000" b="0" i="0" dirty="0">
+                <a:solidFill>
+                  <a:srgbClr val="A6F750"/>
+                </a:solidFill>
+                <a:latin typeface="Segoe UI"/>
+              </a:rPr>
+              <a:t> · CY-SE-013 - Supply Chain Security</a:t>
             </a:r>
           </a:p>
         </p:txBody>
@@ -4782,7 +4791,7 @@
           <a:p>
             <a:pPr algn="l"/>
             <a:r>
-              <a:rPr sz="1100" b="0" i="0">
+              <a:rPr sz="1100" b="0" i="0" dirty="0">
                 <a:solidFill>
                   <a:srgbClr val="181C23"/>
                 </a:solidFill>
@@ -15567,8 +15576,8 @@
         </p:nvSpPr>
         <p:spPr>
           <a:xfrm>
-            <a:off x="5306412" y="1746148"/>
-            <a:ext cx="3525888" cy="640000"/>
+            <a:off x="5306412" y="1863465"/>
+            <a:ext cx="3525888" cy="405367"/>
           </a:xfrm>
           <a:prstGeom prst="rect">
             <a:avLst/>
@@ -15587,23 +15596,92 @@
               </a:lnSpc>
             </a:pPr>
             <a:r>
-              <a:rPr sz="1300" b="0" i="0">
+              <a:rPr sz="1300" b="0" i="0" dirty="0" err="1">
                 <a:solidFill>
                   <a:srgbClr val="181C23"/>
                 </a:solidFill>
                 <a:latin typeface="Segoe UI Semibold"/>
               </a:rPr>
-              <a:t>Desenvolvimento: </a:t>
-            </a:r>
-            <a:r>
-              <a:rPr sz="1300" b="0" i="0">
+              <a:t>Desenvolvimento</a:t>
+            </a:r>
+            <a:r>
+              <a:rPr sz="1300" b="0" i="0" dirty="0">
+                <a:solidFill>
+                  <a:srgbClr val="181C23"/>
+                </a:solidFill>
+                <a:latin typeface="Segoe UI Semibold"/>
+              </a:rPr>
+              <a:t>: </a:t>
+            </a:r>
+            <a:r>
+              <a:rPr sz="1300" b="0" i="0" dirty="0" err="1">
                 <a:solidFill>
                   <a:srgbClr val="6A707D"/>
                 </a:solidFill>
                 <a:latin typeface="Segoe UI"/>
               </a:rPr>
-              <a:t>código autoral, revisão, segredos</a:t>
-            </a:r>
+              <a:t>código</a:t>
+            </a:r>
+            <a:r>
+              <a:rPr sz="1300" b="0" i="0" dirty="0">
+                <a:solidFill>
+                  <a:srgbClr val="6A707D"/>
+                </a:solidFill>
+                <a:latin typeface="Segoe UI"/>
+              </a:rPr>
+              <a:t> </a:t>
+            </a:r>
+            <a:r>
+              <a:rPr sz="1300" b="0" i="0" dirty="0" err="1">
+                <a:solidFill>
+                  <a:srgbClr val="6A707D"/>
+                </a:solidFill>
+                <a:latin typeface="Segoe UI"/>
+              </a:rPr>
+              <a:t>autoral</a:t>
+            </a:r>
+            <a:r>
+              <a:rPr sz="1300" b="0" i="0" dirty="0">
+                <a:solidFill>
+                  <a:srgbClr val="6A707D"/>
+                </a:solidFill>
+                <a:latin typeface="Segoe UI"/>
+              </a:rPr>
+              <a:t>, </a:t>
+            </a:r>
+            <a:r>
+              <a:rPr sz="1300" b="0" i="0" dirty="0" err="1">
+                <a:solidFill>
+                  <a:srgbClr val="6A707D"/>
+                </a:solidFill>
+                <a:latin typeface="Segoe UI"/>
+              </a:rPr>
+              <a:t>revisão</a:t>
+            </a:r>
+            <a:r>
+              <a:rPr sz="1300" b="0" i="0" dirty="0">
+                <a:solidFill>
+                  <a:srgbClr val="6A707D"/>
+                </a:solidFill>
+                <a:latin typeface="Segoe UI"/>
+              </a:rPr>
+              <a:t>, </a:t>
+            </a:r>
+            <a:r>
+              <a:rPr lang="pt-PT" sz="1300" b="0" i="0" dirty="0" err="1">
+                <a:solidFill>
+                  <a:srgbClr val="6A707D"/>
+                </a:solidFill>
+                <a:latin typeface="Segoe UI"/>
+              </a:rPr>
+              <a:t>secrets</a:t>
+            </a:r>
+            <a:endParaRPr sz="1300" b="0" i="0" dirty="0">
+              <a:solidFill>
+                <a:srgbClr val="6A707D"/>
+              </a:solidFill>
+              <a:latin typeface="Segoe UI"/>
+            </a:endParaRPr>
           </a:p>
         </p:txBody>
       </p:sp>
@@ -18239,13 +18317,31 @@
           <a:p>
             <a:pPr algn="l"/>
             <a:r>
-              <a:rPr sz="800" b="0" i="0">
+              <a:rPr sz="800" b="0" i="0" dirty="0">
                 <a:solidFill>
                   <a:srgbClr val="6A707D"/>
                 </a:solidFill>
                 <a:latin typeface="Segoe UI"/>
               </a:rPr>
-              <a:t>Ada · CY-SE-013 - Supply Chain Security · Policy as Code e Compliance Automatizado | Everton J Benedicto</a:t>
+              <a:t>Ada · CY-SE-013 - Supply Chain Security · Policy as Code e Compliance </a:t>
+            </a:r>
+            <a:r>
+              <a:rPr sz="800" b="0" i="0" dirty="0" err="1">
+                <a:solidFill>
+                  <a:srgbClr val="6A707D"/>
+                </a:solidFill>
+                <a:latin typeface="Segoe UI"/>
+              </a:rPr>
+              <a:t>Automatizado</a:t>
+            </a:r>
+            <a:r>
+              <a:rPr sz="800" b="0" i="0" dirty="0">
+                <a:solidFill>
+                  <a:srgbClr val="6A707D"/>
+                </a:solidFill>
+                <a:latin typeface="Segoe UI"/>
+              </a:rPr>
+              <a:t> | Everton J Benedicto</a:t>
             </a:r>
           </a:p>
         </p:txBody>
@@ -18383,7 +18479,7 @@
           <a:p>
             <a:pPr algn="l"/>
             <a:r>
-              <a:rPr sz="900" b="0" i="0" u="none">
+              <a:rPr sz="900" b="0" i="0" u="none" dirty="0">
                 <a:solidFill>
                   <a:srgbClr val="2371FF"/>
                 </a:solidFill>
@@ -19210,14 +19306,92 @@
           <a:p>
             <a:pPr algn="l"/>
             <a:r>
-              <a:rPr sz="1200" b="0" i="0">
+              <a:rPr sz="1200" b="0" i="0" dirty="0" err="1">
                 <a:solidFill>
                   <a:srgbClr val="181C23"/>
                 </a:solidFill>
                 <a:latin typeface="Segoe UI"/>
               </a:rPr>
-              <a:t>Regra em arquivo .rego versionado</a:t>
-            </a:r>
+              <a:t>Regra</a:t>
+            </a:r>
+            <a:r>
+              <a:rPr sz="1200" b="0" i="0" dirty="0">
+                <a:solidFill>
+                  <a:srgbClr val="181C23"/>
+                </a:solidFill>
+                <a:latin typeface="Segoe UI"/>
+              </a:rPr>
+              <a:t> </a:t>
+            </a:r>
+            <a:r>
+              <a:rPr sz="1200" b="0" i="0" dirty="0" err="1">
+                <a:solidFill>
+                  <a:srgbClr val="181C23"/>
+                </a:solidFill>
+                <a:latin typeface="Segoe UI"/>
+              </a:rPr>
+              <a:t>em</a:t>
+            </a:r>
+            <a:r>
+              <a:rPr sz="1200" b="0" i="0" dirty="0">
+                <a:solidFill>
+                  <a:srgbClr val="181C23"/>
+                </a:solidFill>
+                <a:latin typeface="Segoe UI"/>
+              </a:rPr>
+              <a:t> </a:t>
+            </a:r>
+            <a:r>
+              <a:rPr sz="1200" b="0" i="0" dirty="0" err="1">
+                <a:solidFill>
+                  <a:srgbClr val="181C23"/>
+                </a:solidFill>
+                <a:latin typeface="Segoe UI"/>
+              </a:rPr>
+              <a:t>arquivo</a:t>
+            </a:r>
+            <a:r>
+              <a:rPr sz="1200" b="0" i="0" dirty="0">
+                <a:solidFill>
+                  <a:srgbClr val="181C23"/>
+                </a:solidFill>
+                <a:latin typeface="Segoe UI"/>
+              </a:rPr>
+              <a:t> .</a:t>
+            </a:r>
+            <a:r>
+              <a:rPr sz="1200" b="0" i="0" dirty="0" err="1">
+                <a:solidFill>
+                  <a:srgbClr val="181C23"/>
+                </a:solidFill>
+                <a:latin typeface="Segoe UI"/>
+              </a:rPr>
+              <a:t>rego</a:t>
+            </a:r>
+            <a:r>
+              <a:rPr sz="1200" b="0" i="0" dirty="0">
+                <a:solidFill>
+                  <a:srgbClr val="181C23"/>
+                </a:solidFill>
+                <a:latin typeface="Segoe UI"/>
+              </a:rPr>
+              <a:t> </a:t>
+            </a:r>
+            <a:r>
+              <a:rPr sz="1200" b="0" i="0" dirty="0" err="1">
+                <a:solidFill>
+                  <a:srgbClr val="181C23"/>
+                </a:solidFill>
+                <a:latin typeface="Segoe UI"/>
+              </a:rPr>
+              <a:t>versionado</a:t>
+            </a:r>
+            <a:endParaRPr sz="1200" b="0" i="0" dirty="0">
+              <a:solidFill>
+                <a:srgbClr val="181C23"/>
+              </a:solidFill>
+              <a:latin typeface="Segoe UI"/>
+            </a:endParaRPr>
           </a:p>
         </p:txBody>
       </p:sp>
